--- a/make_presentation/templates/templates/creative/no_logo_8.pptx
+++ b/make_presentation/templates/templates/creative/no_logo_8.pptx
@@ -74,13 +74,7 @@
               <a:rPr b="0" lang="en-US" sz="4400" spc="-1" strike="noStrike">
                 <a:latin typeface="Arial"/>
               </a:rPr>
-              <a:t>Click to move </a:t>
-            </a:r>
-            <a:r>
-              <a:rPr b="0" lang="en-US" sz="4400" spc="-1" strike="noStrike">
-                <a:latin typeface="Arial"/>
-              </a:rPr>
-              <a:t>the slide</a:t>
+              <a:t>Click to move the slide</a:t>
             </a:r>
             <a:endParaRPr b="0" lang="en-US" sz="4400" spc="-1" strike="noStrike">
               <a:latin typeface="Arial"/>
@@ -305,7 +299,7 @@
             <a:pPr algn="r">
               <a:buNone/>
             </a:pPr>
-            <a:fld id="{507429F2-9B9B-4B8D-89AF-152CCA5117E2}" type="slidenum">
+            <a:fld id="{B26E517A-D074-419D-A4EF-F1BEB3F0D019}" type="slidenum">
               <a:rPr b="0" lang="en-US" sz="1400" spc="-1" strike="noStrike">
                 <a:latin typeface="Times New Roman"/>
               </a:rPr>
@@ -353,7 +347,7 @@
         <p:spPr>
           <a:xfrm>
             <a:off x="685800" y="1143000"/>
-            <a:ext cx="5485680" cy="3085560"/>
+            <a:ext cx="5485320" cy="3085200"/>
           </a:xfrm>
           <a:prstGeom prst="rect">
             <a:avLst/>
@@ -376,7 +370,7 @@
         <p:spPr>
           <a:xfrm>
             <a:off x="685800" y="4400640"/>
-            <a:ext cx="5485680" cy="3599640"/>
+            <a:ext cx="5485320" cy="3599280"/>
           </a:xfrm>
           <a:prstGeom prst="rect">
             <a:avLst/>
@@ -410,7 +404,7 @@
         <p:spPr>
           <a:xfrm>
             <a:off x="3884760" y="8685360"/>
-            <a:ext cx="2971080" cy="457920"/>
+            <a:ext cx="2970720" cy="457560"/>
           </a:xfrm>
           <a:prstGeom prst="rect">
             <a:avLst/>
@@ -442,7 +436,7 @@
               </a:lnSpc>
               <a:buNone/>
             </a:pPr>
-            <a:fld id="{FF7C5AF1-5E7D-4DE7-AF85-9295FB22721B}" type="slidenum">
+            <a:fld id="{CF4F411F-BE87-497D-AB7E-B713E5D6C2BD}" type="slidenum">
               <a:rPr b="0" lang="ru-RU" sz="1200" spc="-1" strike="noStrike">
                 <a:latin typeface="Times New Roman"/>
               </a:rPr>
@@ -489,7 +483,7 @@
         <p:spPr>
           <a:xfrm>
             <a:off x="685800" y="1143000"/>
-            <a:ext cx="5485680" cy="3085560"/>
+            <a:ext cx="5485320" cy="3085200"/>
           </a:xfrm>
           <a:prstGeom prst="rect">
             <a:avLst/>
@@ -512,7 +506,7 @@
         <p:spPr>
           <a:xfrm>
             <a:off x="685800" y="4400640"/>
-            <a:ext cx="5485680" cy="3599640"/>
+            <a:ext cx="5485320" cy="3599280"/>
           </a:xfrm>
           <a:prstGeom prst="rect">
             <a:avLst/>
@@ -546,7 +540,7 @@
         <p:spPr>
           <a:xfrm>
             <a:off x="3884760" y="8685360"/>
-            <a:ext cx="2971080" cy="457920"/>
+            <a:ext cx="2970720" cy="457560"/>
           </a:xfrm>
           <a:prstGeom prst="rect">
             <a:avLst/>
@@ -578,7 +572,7 @@
               </a:lnSpc>
               <a:buNone/>
             </a:pPr>
-            <a:fld id="{84F15AB8-017E-4BB8-809F-F128310E6318}" type="slidenum">
+            <a:fld id="{E32B9057-6388-4AEF-83E3-A743A89D600E}" type="slidenum">
               <a:rPr b="0" lang="ru-RU" sz="1200" spc="-1" strike="noStrike">
                 <a:latin typeface="Times New Roman"/>
               </a:rPr>
@@ -646,7 +640,7 @@
         <p:txBody>
           <a:bodyPr/>
           <a:p>
-            <a:fld id="{0A97F929-092B-4C7B-86AF-4256AEBB3E19}" type="slidenum">
+            <a:fld id="{F2F05813-91D5-4869-970F-3672B2C6A8A0}" type="slidenum">
               <a:t>&lt;#&gt;</a:t>
             </a:fld>
           </a:p>
@@ -708,7 +702,7 @@
         <p:spPr>
           <a:xfrm>
             <a:off x="1143000" y="841680"/>
-            <a:ext cx="6857280" cy="1789920"/>
+            <a:ext cx="6856920" cy="1789560"/>
           </a:xfrm>
           <a:prstGeom prst="rect">
             <a:avLst/>
@@ -745,7 +739,7 @@
         <p:spPr>
           <a:xfrm>
             <a:off x="457200" y="1203480"/>
-            <a:ext cx="8229240" cy="1422720"/>
+            <a:ext cx="8228880" cy="1422360"/>
           </a:xfrm>
           <a:prstGeom prst="rect">
             <a:avLst/>
@@ -778,8 +772,8 @@
         </p:nvSpPr>
         <p:spPr>
           <a:xfrm>
-            <a:off x="457200" y="2761920"/>
-            <a:ext cx="8229240" cy="1422720"/>
+            <a:off x="457200" y="2761200"/>
+            <a:ext cx="8228880" cy="1422360"/>
           </a:xfrm>
           <a:prstGeom prst="rect">
             <a:avLst/>
@@ -834,7 +828,7 @@
         <p:txBody>
           <a:bodyPr/>
           <a:p>
-            <a:fld id="{C11A4F74-6FB6-4424-9ACF-3D59DF8BDE68}" type="slidenum">
+            <a:fld id="{2669B2EE-05E0-4241-AF56-DAADE452A5B4}" type="slidenum">
               <a:t>&lt;#&gt;</a:t>
             </a:fld>
           </a:p>
@@ -896,7 +890,7 @@
         <p:spPr>
           <a:xfrm>
             <a:off x="1143000" y="841680"/>
-            <a:ext cx="6857280" cy="1789920"/>
+            <a:ext cx="6856920" cy="1789560"/>
           </a:xfrm>
           <a:prstGeom prst="rect">
             <a:avLst/>
@@ -933,7 +927,7 @@
         <p:spPr>
           <a:xfrm>
             <a:off x="457200" y="1203480"/>
-            <a:ext cx="4015800" cy="1422720"/>
+            <a:ext cx="4015440" cy="1422360"/>
           </a:xfrm>
           <a:prstGeom prst="rect">
             <a:avLst/>
@@ -966,8 +960,8 @@
         </p:nvSpPr>
         <p:spPr>
           <a:xfrm>
-            <a:off x="4674240" y="1203480"/>
-            <a:ext cx="4015800" cy="1422720"/>
+            <a:off x="4673880" y="1203480"/>
+            <a:ext cx="4015440" cy="1422360"/>
           </a:xfrm>
           <a:prstGeom prst="rect">
             <a:avLst/>
@@ -1000,8 +994,8 @@
         </p:nvSpPr>
         <p:spPr>
           <a:xfrm>
-            <a:off x="457200" y="2761920"/>
-            <a:ext cx="4015800" cy="1422720"/>
+            <a:off x="457200" y="2761200"/>
+            <a:ext cx="4015440" cy="1422360"/>
           </a:xfrm>
           <a:prstGeom prst="rect">
             <a:avLst/>
@@ -1034,8 +1028,8 @@
         </p:nvSpPr>
         <p:spPr>
           <a:xfrm>
-            <a:off x="4674240" y="2761920"/>
-            <a:ext cx="4015800" cy="1422720"/>
+            <a:off x="4673880" y="2761200"/>
+            <a:ext cx="4015440" cy="1422360"/>
           </a:xfrm>
           <a:prstGeom prst="rect">
             <a:avLst/>
@@ -1090,7 +1084,7 @@
         <p:txBody>
           <a:bodyPr/>
           <a:p>
-            <a:fld id="{BECE2259-CFF0-4828-88FE-EE7865F5E343}" type="slidenum">
+            <a:fld id="{9F4E1C6C-02EC-4AEB-9D01-0002DB484149}" type="slidenum">
               <a:t>&lt;#&gt;</a:t>
             </a:fld>
           </a:p>
@@ -1152,7 +1146,7 @@
         <p:spPr>
           <a:xfrm>
             <a:off x="1143000" y="841680"/>
-            <a:ext cx="6857280" cy="1789920"/>
+            <a:ext cx="6856920" cy="1789560"/>
           </a:xfrm>
           <a:prstGeom prst="rect">
             <a:avLst/>
@@ -1189,7 +1183,7 @@
         <p:spPr>
           <a:xfrm>
             <a:off x="457200" y="1203480"/>
-            <a:ext cx="2649600" cy="1422720"/>
+            <a:ext cx="2649600" cy="1422360"/>
           </a:xfrm>
           <a:prstGeom prst="rect">
             <a:avLst/>
@@ -1223,7 +1217,7 @@
         <p:spPr>
           <a:xfrm>
             <a:off x="3239640" y="1203480"/>
-            <a:ext cx="2649600" cy="1422720"/>
+            <a:ext cx="2649600" cy="1422360"/>
           </a:xfrm>
           <a:prstGeom prst="rect">
             <a:avLst/>
@@ -1257,7 +1251,7 @@
         <p:spPr>
           <a:xfrm>
             <a:off x="6022080" y="1203480"/>
-            <a:ext cx="2649600" cy="1422720"/>
+            <a:ext cx="2649600" cy="1422360"/>
           </a:xfrm>
           <a:prstGeom prst="rect">
             <a:avLst/>
@@ -1290,8 +1284,8 @@
         </p:nvSpPr>
         <p:spPr>
           <a:xfrm>
-            <a:off x="457200" y="2761920"/>
-            <a:ext cx="2649600" cy="1422720"/>
+            <a:off x="457200" y="2761200"/>
+            <a:ext cx="2649600" cy="1422360"/>
           </a:xfrm>
           <a:prstGeom prst="rect">
             <a:avLst/>
@@ -1324,8 +1318,8 @@
         </p:nvSpPr>
         <p:spPr>
           <a:xfrm>
-            <a:off x="3239640" y="2761920"/>
-            <a:ext cx="2649600" cy="1422720"/>
+            <a:off x="3239640" y="2761200"/>
+            <a:ext cx="2649600" cy="1422360"/>
           </a:xfrm>
           <a:prstGeom prst="rect">
             <a:avLst/>
@@ -1358,8 +1352,8 @@
         </p:nvSpPr>
         <p:spPr>
           <a:xfrm>
-            <a:off x="6022080" y="2761920"/>
-            <a:ext cx="2649600" cy="1422720"/>
+            <a:off x="6022080" y="2761200"/>
+            <a:ext cx="2649600" cy="1422360"/>
           </a:xfrm>
           <a:prstGeom prst="rect">
             <a:avLst/>
@@ -1414,7 +1408,7 @@
         <p:txBody>
           <a:bodyPr/>
           <a:p>
-            <a:fld id="{37B5695C-BEBF-491F-86A5-410AE9F2358B}" type="slidenum">
+            <a:fld id="{CBC327A2-BE3D-4AD3-9CC7-4877C2A2AAB6}" type="slidenum">
               <a:t>&lt;#&gt;</a:t>
             </a:fld>
           </a:p>
@@ -1476,7 +1470,7 @@
         <p:spPr>
           <a:xfrm>
             <a:off x="1143000" y="841680"/>
-            <a:ext cx="6857280" cy="1789920"/>
+            <a:ext cx="6856920" cy="1789560"/>
           </a:xfrm>
           <a:prstGeom prst="rect">
             <a:avLst/>
@@ -1513,7 +1507,7 @@
         <p:spPr>
           <a:xfrm>
             <a:off x="457200" y="1203480"/>
-            <a:ext cx="8229240" cy="2982960"/>
+            <a:ext cx="8228880" cy="2982600"/>
           </a:xfrm>
           <a:prstGeom prst="rect">
             <a:avLst/>
@@ -1571,7 +1565,7 @@
         <p:txBody>
           <a:bodyPr/>
           <a:p>
-            <a:fld id="{A5DCCAF1-8575-4896-8428-0B54159147BA}" type="slidenum">
+            <a:fld id="{CD03A023-6D12-4FA6-9AF9-A7DE8CE4A777}" type="slidenum">
               <a:t>&lt;#&gt;</a:t>
             </a:fld>
           </a:p>
@@ -1633,7 +1627,7 @@
         <p:spPr>
           <a:xfrm>
             <a:off x="1143000" y="841680"/>
-            <a:ext cx="6857280" cy="1789920"/>
+            <a:ext cx="6856920" cy="1789560"/>
           </a:xfrm>
           <a:prstGeom prst="rect">
             <a:avLst/>
@@ -1670,7 +1664,7 @@
         <p:spPr>
           <a:xfrm>
             <a:off x="457200" y="1203480"/>
-            <a:ext cx="8229240" cy="2982960"/>
+            <a:ext cx="8228880" cy="2982600"/>
           </a:xfrm>
           <a:prstGeom prst="rect">
             <a:avLst/>
@@ -1725,7 +1719,7 @@
         <p:txBody>
           <a:bodyPr/>
           <a:p>
-            <a:fld id="{E843F6D7-D5AB-42E2-9E7D-7849D7E17877}" type="slidenum">
+            <a:fld id="{53B2AF28-9FF3-4B1A-A287-466D533A1BEB}" type="slidenum">
               <a:t>&lt;#&gt;</a:t>
             </a:fld>
           </a:p>
@@ -1787,7 +1781,7 @@
         <p:spPr>
           <a:xfrm>
             <a:off x="1143000" y="841680"/>
-            <a:ext cx="6857280" cy="1789920"/>
+            <a:ext cx="6856920" cy="1789560"/>
           </a:xfrm>
           <a:prstGeom prst="rect">
             <a:avLst/>
@@ -1824,7 +1818,7 @@
         <p:spPr>
           <a:xfrm>
             <a:off x="457200" y="1203480"/>
-            <a:ext cx="4015800" cy="2982960"/>
+            <a:ext cx="4015440" cy="2982600"/>
           </a:xfrm>
           <a:prstGeom prst="rect">
             <a:avLst/>
@@ -1857,8 +1851,8 @@
         </p:nvSpPr>
         <p:spPr>
           <a:xfrm>
-            <a:off x="4674240" y="1203480"/>
-            <a:ext cx="4015800" cy="2982960"/>
+            <a:off x="4673880" y="1203480"/>
+            <a:ext cx="4015440" cy="2982600"/>
           </a:xfrm>
           <a:prstGeom prst="rect">
             <a:avLst/>
@@ -1913,7 +1907,7 @@
         <p:txBody>
           <a:bodyPr/>
           <a:p>
-            <a:fld id="{19A38381-C1EF-463F-AC68-D9FB09E5FC86}" type="slidenum">
+            <a:fld id="{765A69D9-0955-44E6-8EBF-22D3C27E9160}" type="slidenum">
               <a:t>&lt;#&gt;</a:t>
             </a:fld>
           </a:p>
@@ -1975,7 +1969,7 @@
         <p:spPr>
           <a:xfrm>
             <a:off x="1143000" y="841680"/>
-            <a:ext cx="6857280" cy="1789920"/>
+            <a:ext cx="6856920" cy="1789560"/>
           </a:xfrm>
           <a:prstGeom prst="rect">
             <a:avLst/>
@@ -2033,7 +2027,7 @@
         <p:txBody>
           <a:bodyPr/>
           <a:p>
-            <a:fld id="{7A44370C-2EB2-48AE-BEF0-BE2594F7F001}" type="slidenum">
+            <a:fld id="{2AD07FAA-0B9D-40E9-8F92-9DC656663F54}" type="slidenum">
               <a:t>&lt;#&gt;</a:t>
             </a:fld>
           </a:p>
@@ -2095,7 +2089,7 @@
         <p:spPr>
           <a:xfrm>
             <a:off x="1143000" y="841680"/>
-            <a:ext cx="6857280" cy="8298360"/>
+            <a:ext cx="6856920" cy="8296560"/>
           </a:xfrm>
           <a:prstGeom prst="rect">
             <a:avLst/>
@@ -2153,7 +2147,7 @@
         <p:txBody>
           <a:bodyPr/>
           <a:p>
-            <a:fld id="{6594EC13-4DFE-4E7E-AD99-8005B265C495}" type="slidenum">
+            <a:fld id="{412E9E93-329D-4217-9CE5-8036C3FCCD62}" type="slidenum">
               <a:t>&lt;#&gt;</a:t>
             </a:fld>
           </a:p>
@@ -2215,7 +2209,7 @@
         <p:spPr>
           <a:xfrm>
             <a:off x="1143000" y="841680"/>
-            <a:ext cx="6857280" cy="1789920"/>
+            <a:ext cx="6856920" cy="1789560"/>
           </a:xfrm>
           <a:prstGeom prst="rect">
             <a:avLst/>
@@ -2252,7 +2246,7 @@
         <p:spPr>
           <a:xfrm>
             <a:off x="457200" y="1203480"/>
-            <a:ext cx="4015800" cy="1422720"/>
+            <a:ext cx="4015440" cy="1422360"/>
           </a:xfrm>
           <a:prstGeom prst="rect">
             <a:avLst/>
@@ -2285,8 +2279,8 @@
         </p:nvSpPr>
         <p:spPr>
           <a:xfrm>
-            <a:off x="4674240" y="1203480"/>
-            <a:ext cx="4015800" cy="2982960"/>
+            <a:off x="4673880" y="1203480"/>
+            <a:ext cx="4015440" cy="2982600"/>
           </a:xfrm>
           <a:prstGeom prst="rect">
             <a:avLst/>
@@ -2319,8 +2313,8 @@
         </p:nvSpPr>
         <p:spPr>
           <a:xfrm>
-            <a:off x="457200" y="2761920"/>
-            <a:ext cx="4015800" cy="1422720"/>
+            <a:off x="457200" y="2761200"/>
+            <a:ext cx="4015440" cy="1422360"/>
           </a:xfrm>
           <a:prstGeom prst="rect">
             <a:avLst/>
@@ -2375,7 +2369,7 @@
         <p:txBody>
           <a:bodyPr/>
           <a:p>
-            <a:fld id="{1ADE93AD-36BC-4402-B774-D13966304844}" type="slidenum">
+            <a:fld id="{7C27F956-DBC0-4FC9-A71C-D9FF01FB63BD}" type="slidenum">
               <a:t>&lt;#&gt;</a:t>
             </a:fld>
           </a:p>
@@ -2437,7 +2431,7 @@
         <p:spPr>
           <a:xfrm>
             <a:off x="1143000" y="841680"/>
-            <a:ext cx="6857280" cy="1789920"/>
+            <a:ext cx="6856920" cy="1789560"/>
           </a:xfrm>
           <a:prstGeom prst="rect">
             <a:avLst/>
@@ -2474,7 +2468,7 @@
         <p:spPr>
           <a:xfrm>
             <a:off x="457200" y="1203480"/>
-            <a:ext cx="4015800" cy="2982960"/>
+            <a:ext cx="4015440" cy="2982600"/>
           </a:xfrm>
           <a:prstGeom prst="rect">
             <a:avLst/>
@@ -2507,8 +2501,8 @@
         </p:nvSpPr>
         <p:spPr>
           <a:xfrm>
-            <a:off x="4674240" y="1203480"/>
-            <a:ext cx="4015800" cy="1422720"/>
+            <a:off x="4673880" y="1203480"/>
+            <a:ext cx="4015440" cy="1422360"/>
           </a:xfrm>
           <a:prstGeom prst="rect">
             <a:avLst/>
@@ -2541,8 +2535,8 @@
         </p:nvSpPr>
         <p:spPr>
           <a:xfrm>
-            <a:off x="4674240" y="2761920"/>
-            <a:ext cx="4015800" cy="1422720"/>
+            <a:off x="4673880" y="2761200"/>
+            <a:ext cx="4015440" cy="1422360"/>
           </a:xfrm>
           <a:prstGeom prst="rect">
             <a:avLst/>
@@ -2597,7 +2591,7 @@
         <p:txBody>
           <a:bodyPr/>
           <a:p>
-            <a:fld id="{A894F243-C6D7-4164-BEF4-DC6DACE88471}" type="slidenum">
+            <a:fld id="{B62FE660-5D44-42E4-8A37-86C5A56F32D4}" type="slidenum">
               <a:t>&lt;#&gt;</a:t>
             </a:fld>
           </a:p>
@@ -2659,7 +2653,7 @@
         <p:spPr>
           <a:xfrm>
             <a:off x="1143000" y="841680"/>
-            <a:ext cx="6857280" cy="1789920"/>
+            <a:ext cx="6856920" cy="1789560"/>
           </a:xfrm>
           <a:prstGeom prst="rect">
             <a:avLst/>
@@ -2696,7 +2690,7 @@
         <p:spPr>
           <a:xfrm>
             <a:off x="457200" y="1203480"/>
-            <a:ext cx="4015800" cy="1422720"/>
+            <a:ext cx="4015440" cy="1422360"/>
           </a:xfrm>
           <a:prstGeom prst="rect">
             <a:avLst/>
@@ -2729,8 +2723,8 @@
         </p:nvSpPr>
         <p:spPr>
           <a:xfrm>
-            <a:off x="4674240" y="1203480"/>
-            <a:ext cx="4015800" cy="1422720"/>
+            <a:off x="4673880" y="1203480"/>
+            <a:ext cx="4015440" cy="1422360"/>
           </a:xfrm>
           <a:prstGeom prst="rect">
             <a:avLst/>
@@ -2763,8 +2757,8 @@
         </p:nvSpPr>
         <p:spPr>
           <a:xfrm>
-            <a:off x="457200" y="2761920"/>
-            <a:ext cx="8229240" cy="1422720"/>
+            <a:off x="457200" y="2761200"/>
+            <a:ext cx="8228880" cy="1422360"/>
           </a:xfrm>
           <a:prstGeom prst="rect">
             <a:avLst/>
@@ -2819,7 +2813,7 @@
         <p:txBody>
           <a:bodyPr/>
           <a:p>
-            <a:fld id="{326B2EC9-9161-4862-8915-13BBFB005E63}" type="slidenum">
+            <a:fld id="{808A336A-B860-46E4-8EC5-761E4033324D}" type="slidenum">
               <a:t>&lt;#&gt;</a:t>
             </a:fld>
           </a:p>
@@ -2888,7 +2882,7 @@
         <p:spPr>
           <a:xfrm>
             <a:off x="1143000" y="841680"/>
-            <a:ext cx="6857280" cy="1789920"/>
+            <a:ext cx="6856920" cy="1789560"/>
           </a:xfrm>
           <a:prstGeom prst="rect">
             <a:avLst/>
@@ -2907,85 +2901,7 @@
               <a:rPr b="0" lang="en-US" sz="1800" spc="-1" strike="noStrike">
                 <a:latin typeface="Arial"/>
               </a:rPr>
-              <a:t>Cli</a:t>
-            </a:r>
-            <a:r>
-              <a:rPr b="0" lang="en-US" sz="1800" spc="-1" strike="noStrike">
-                <a:latin typeface="Arial"/>
-              </a:rPr>
-              <a:t>ck </a:t>
-            </a:r>
-            <a:r>
-              <a:rPr b="0" lang="en-US" sz="1800" spc="-1" strike="noStrike">
-                <a:latin typeface="Arial"/>
-              </a:rPr>
-              <a:t>to </a:t>
-            </a:r>
-            <a:r>
-              <a:rPr b="0" lang="en-US" sz="1800" spc="-1" strike="noStrike">
-                <a:latin typeface="Arial"/>
-              </a:rPr>
-              <a:t>edi</a:t>
-            </a:r>
-            <a:r>
-              <a:rPr b="0" lang="en-US" sz="1800" spc="-1" strike="noStrike">
-                <a:latin typeface="Arial"/>
-              </a:rPr>
-              <a:t>t </a:t>
-            </a:r>
-            <a:r>
-              <a:rPr b="0" lang="en-US" sz="1800" spc="-1" strike="noStrike">
-                <a:latin typeface="Arial"/>
-              </a:rPr>
-              <a:t>th</a:t>
-            </a:r>
-            <a:r>
-              <a:rPr b="0" lang="en-US" sz="1800" spc="-1" strike="noStrike">
-                <a:latin typeface="Arial"/>
-              </a:rPr>
-              <a:t>e </a:t>
-            </a:r>
-            <a:r>
-              <a:rPr b="0" lang="en-US" sz="1800" spc="-1" strike="noStrike">
-                <a:latin typeface="Arial"/>
-              </a:rPr>
-              <a:t>titl</a:t>
-            </a:r>
-            <a:r>
-              <a:rPr b="0" lang="en-US" sz="1800" spc="-1" strike="noStrike">
-                <a:latin typeface="Arial"/>
-              </a:rPr>
-              <a:t>e </a:t>
-            </a:r>
-            <a:r>
-              <a:rPr b="0" lang="en-US" sz="1800" spc="-1" strike="noStrike">
-                <a:latin typeface="Arial"/>
-              </a:rPr>
-              <a:t>tex</a:t>
-            </a:r>
-            <a:r>
-              <a:rPr b="0" lang="en-US" sz="1800" spc="-1" strike="noStrike">
-                <a:latin typeface="Arial"/>
-              </a:rPr>
-              <a:t>t </a:t>
-            </a:r>
-            <a:r>
-              <a:rPr b="0" lang="en-US" sz="1800" spc="-1" strike="noStrike">
-                <a:latin typeface="Arial"/>
-              </a:rPr>
-              <a:t>for</a:t>
-            </a:r>
-            <a:r>
-              <a:rPr b="0" lang="en-US" sz="1800" spc="-1" strike="noStrike">
-                <a:latin typeface="Arial"/>
-              </a:rPr>
-              <a:t>m</a:t>
-            </a:r>
-            <a:r>
-              <a:rPr b="0" lang="en-US" sz="1800" spc="-1" strike="noStrike">
-                <a:latin typeface="Arial"/>
-              </a:rPr>
-              <a:t>at</a:t>
+              <a:t>Click to edit the title text format</a:t>
             </a:r>
             <a:endParaRPr b="0" lang="en-US" sz="1800" spc="-1" strike="noStrike">
               <a:latin typeface="Arial"/>
@@ -3000,180 +2916,13 @@
             <a:spLocks noGrp="1"/>
           </p:cNvSpPr>
           <p:nvPr>
-            <p:ph type="ftr" idx="1"/>
-          </p:nvPr>
-        </p:nvSpPr>
-        <p:spPr>
-          <a:xfrm>
-            <a:off x="3029040" y="4767120"/>
-            <a:ext cx="3085560" cy="273240"/>
-          </a:xfrm>
-          <a:prstGeom prst="rect">
-            <a:avLst/>
-          </a:prstGeom>
-          <a:noFill/>
-          <a:ln w="0">
-            <a:noFill/>
-          </a:ln>
-        </p:spPr>
-        <p:txBody>
-          <a:bodyPr lIns="90000" rIns="90000" tIns="45000" bIns="45000" anchor="ctr">
-            <a:noAutofit/>
-          </a:bodyPr>
-          <a:lstStyle>
-            <a:lvl1pPr algn="ctr">
-              <a:lnSpc>
-                <a:spcPct val="100000"/>
-              </a:lnSpc>
-              <a:buNone/>
-              <a:defRPr b="0" lang="en-US" sz="1400" spc="-1" strike="noStrike">
-                <a:latin typeface="Times New Roman"/>
-              </a:defRPr>
-            </a:lvl1pPr>
-          </a:lstStyle>
-          <a:p>
-            <a:pPr algn="ctr">
-              <a:lnSpc>
-                <a:spcPct val="100000"/>
-              </a:lnSpc>
-              <a:buNone/>
-            </a:pPr>
-            <a:r>
-              <a:rPr b="0" lang="en-US" sz="1400" spc="-1" strike="noStrike">
-                <a:latin typeface="Times New Roman"/>
-              </a:rPr>
-              <a:t>&lt;footer&gt;</a:t>
-            </a:r>
-            <a:endParaRPr b="0" lang="en-US" sz="1400" spc="-1" strike="noStrike">
-              <a:latin typeface="Times New Roman"/>
-            </a:endParaRPr>
-          </a:p>
-        </p:txBody>
-      </p:sp>
-      <p:sp>
-        <p:nvSpPr>
-          <p:cNvPr id="2" name="PlaceHolder 3"/>
-          <p:cNvSpPr>
-            <a:spLocks noGrp="1"/>
-          </p:cNvSpPr>
-          <p:nvPr>
-            <p:ph type="sldNum" idx="2"/>
-          </p:nvPr>
-        </p:nvSpPr>
-        <p:spPr>
-          <a:xfrm>
-            <a:off x="6458040" y="4767120"/>
-            <a:ext cx="2056680" cy="273240"/>
-          </a:xfrm>
-          <a:prstGeom prst="rect">
-            <a:avLst/>
-          </a:prstGeom>
-          <a:noFill/>
-          <a:ln w="0">
-            <a:noFill/>
-          </a:ln>
-        </p:spPr>
-        <p:txBody>
-          <a:bodyPr lIns="90000" rIns="90000" tIns="45000" bIns="45000" anchor="ctr">
-            <a:noAutofit/>
-          </a:bodyPr>
-          <a:lstStyle>
-            <a:lvl1pPr algn="r">
-              <a:lnSpc>
-                <a:spcPct val="100000"/>
-              </a:lnSpc>
-              <a:buNone/>
-              <a:defRPr b="0" lang="en-US" sz="900" spc="-1" strike="noStrike">
-                <a:solidFill>
-                  <a:srgbClr val="8b8b8b"/>
-                </a:solidFill>
-                <a:latin typeface="Calibri"/>
-              </a:defRPr>
-            </a:lvl1pPr>
-          </a:lstStyle>
-          <a:p>
-            <a:pPr algn="r">
-              <a:lnSpc>
-                <a:spcPct val="100000"/>
-              </a:lnSpc>
-              <a:buNone/>
-            </a:pPr>
-            <a:fld id="{A0CE2AA7-309E-4F3B-902B-C062E8E6D7F2}" type="slidenum">
-              <a:rPr b="0" lang="en-US" sz="900" spc="-1" strike="noStrike">
-                <a:solidFill>
-                  <a:srgbClr val="8b8b8b"/>
-                </a:solidFill>
-                <a:latin typeface="Calibri"/>
-              </a:rPr>
-              <a:t>&lt;number&gt;</a:t>
-            </a:fld>
-            <a:endParaRPr b="0" lang="en-US" sz="900" spc="-1" strike="noStrike">
-              <a:latin typeface="Times New Roman"/>
-            </a:endParaRPr>
-          </a:p>
-        </p:txBody>
-      </p:sp>
-      <p:sp>
-        <p:nvSpPr>
-          <p:cNvPr id="3" name="PlaceHolder 4"/>
-          <p:cNvSpPr>
-            <a:spLocks noGrp="1"/>
-          </p:cNvSpPr>
-          <p:nvPr>
-            <p:ph type="dt" idx="3"/>
-          </p:nvPr>
-        </p:nvSpPr>
-        <p:spPr>
-          <a:xfrm>
-            <a:off x="628560" y="4767120"/>
-            <a:ext cx="2056680" cy="273240"/>
-          </a:xfrm>
-          <a:prstGeom prst="rect">
-            <a:avLst/>
-          </a:prstGeom>
-          <a:noFill/>
-          <a:ln w="0">
-            <a:noFill/>
-          </a:ln>
-        </p:spPr>
-        <p:txBody>
-          <a:bodyPr lIns="90000" rIns="90000" tIns="45000" bIns="45000" anchor="ctr">
-            <a:noAutofit/>
-          </a:bodyPr>
-          <a:lstStyle>
-            <a:lvl1pPr>
-              <a:defRPr b="0" lang="en-US" sz="1400" spc="-1" strike="noStrike">
-                <a:latin typeface="Times New Roman"/>
-              </a:defRPr>
-            </a:lvl1pPr>
-          </a:lstStyle>
-          <a:p>
-            <a:r>
-              <a:rPr b="0" lang="en-US" sz="1400" spc="-1" strike="noStrike">
-                <a:latin typeface="Times New Roman"/>
-              </a:rPr>
-              <a:t>&lt;date/time&gt;</a:t>
-            </a:r>
-            <a:endParaRPr b="0" lang="en-US" sz="1400" spc="-1" strike="noStrike">
-              <a:latin typeface="Times New Roman"/>
-            </a:endParaRPr>
-          </a:p>
-        </p:txBody>
-      </p:sp>
-      <p:sp>
-        <p:nvSpPr>
-          <p:cNvPr id="4" name="PlaceHolder 5"/>
-          <p:cNvSpPr>
-            <a:spLocks noGrp="1"/>
-          </p:cNvSpPr>
-          <p:nvPr>
             <p:ph type="body"/>
           </p:nvPr>
         </p:nvSpPr>
         <p:spPr>
           <a:xfrm>
             <a:off x="457200" y="1203480"/>
-            <a:ext cx="8229240" cy="2982960"/>
+            <a:ext cx="8228880" cy="2982600"/>
           </a:xfrm>
           <a:prstGeom prst="rect">
             <a:avLst/>
@@ -3200,12 +2949,12 @@
               <a:buChar char=""/>
             </a:pPr>
             <a:r>
-              <a:rPr b="0" lang="en-US" sz="3200" spc="-1" strike="noStrike">
+              <a:rPr b="0" lang="en-US" sz="1800" spc="-1" strike="noStrike">
                 <a:latin typeface="Arial"/>
               </a:rPr>
               <a:t>Click to edit the outline text format</a:t>
             </a:r>
-            <a:endParaRPr b="0" lang="en-US" sz="3200" spc="-1" strike="noStrike">
+            <a:endParaRPr b="0" lang="en-US" sz="1800" spc="-1" strike="noStrike">
               <a:latin typeface="Arial"/>
             </a:endParaRPr>
           </a:p>
@@ -3222,12 +2971,12 @@
               <a:buChar char=""/>
             </a:pPr>
             <a:r>
-              <a:rPr b="0" lang="en-US" sz="2800" spc="-1" strike="noStrike">
+              <a:rPr b="0" lang="en-US" sz="1800" spc="-1" strike="noStrike">
                 <a:latin typeface="Arial"/>
               </a:rPr>
               <a:t>Second Outline Level</a:t>
             </a:r>
-            <a:endParaRPr b="0" lang="en-US" sz="2800" spc="-1" strike="noStrike">
+            <a:endParaRPr b="0" lang="en-US" sz="1800" spc="-1" strike="noStrike">
               <a:latin typeface="Arial"/>
             </a:endParaRPr>
           </a:p>
@@ -3244,12 +2993,12 @@
               <a:buChar char=""/>
             </a:pPr>
             <a:r>
-              <a:rPr b="0" lang="en-US" sz="2400" spc="-1" strike="noStrike">
+              <a:rPr b="0" lang="en-US" sz="1800" spc="-1" strike="noStrike">
                 <a:latin typeface="Arial"/>
               </a:rPr>
               <a:t>Third Outline Level</a:t>
             </a:r>
-            <a:endParaRPr b="0" lang="en-US" sz="2400" spc="-1" strike="noStrike">
+            <a:endParaRPr b="0" lang="en-US" sz="1800" spc="-1" strike="noStrike">
               <a:latin typeface="Arial"/>
             </a:endParaRPr>
           </a:p>
@@ -3266,12 +3015,12 @@
               <a:buChar char=""/>
             </a:pPr>
             <a:r>
-              <a:rPr b="0" lang="en-US" sz="2000" spc="-1" strike="noStrike">
+              <a:rPr b="0" lang="en-US" sz="1800" spc="-1" strike="noStrike">
                 <a:latin typeface="Arial"/>
               </a:rPr>
               <a:t>Fourth Outline Level</a:t>
             </a:r>
-            <a:endParaRPr b="0" lang="en-US" sz="2000" spc="-1" strike="noStrike">
+            <a:endParaRPr b="0" lang="en-US" sz="1800" spc="-1" strike="noStrike">
               <a:latin typeface="Arial"/>
             </a:endParaRPr>
           </a:p>
@@ -3288,12 +3037,12 @@
               <a:buChar char=""/>
             </a:pPr>
             <a:r>
-              <a:rPr b="0" lang="en-US" sz="2000" spc="-1" strike="noStrike">
+              <a:rPr b="0" lang="en-US" sz="1800" spc="-1" strike="noStrike">
                 <a:latin typeface="Arial"/>
               </a:rPr>
               <a:t>Fifth Outline Level</a:t>
             </a:r>
-            <a:endParaRPr b="0" lang="en-US" sz="2000" spc="-1" strike="noStrike">
+            <a:endParaRPr b="0" lang="en-US" sz="1800" spc="-1" strike="noStrike">
               <a:latin typeface="Arial"/>
             </a:endParaRPr>
           </a:p>
@@ -3310,12 +3059,12 @@
               <a:buChar char=""/>
             </a:pPr>
             <a:r>
-              <a:rPr b="0" lang="en-US" sz="2000" spc="-1" strike="noStrike">
+              <a:rPr b="0" lang="en-US" sz="1800" spc="-1" strike="noStrike">
                 <a:latin typeface="Arial"/>
               </a:rPr>
               <a:t>Sixth Outline Level</a:t>
             </a:r>
-            <a:endParaRPr b="0" lang="en-US" sz="2000" spc="-1" strike="noStrike">
+            <a:endParaRPr b="0" lang="en-US" sz="1800" spc="-1" strike="noStrike">
               <a:latin typeface="Arial"/>
             </a:endParaRPr>
           </a:p>
@@ -3332,13 +3081,180 @@
               <a:buChar char=""/>
             </a:pPr>
             <a:r>
-              <a:rPr b="0" lang="en-US" sz="2000" spc="-1" strike="noStrike">
+              <a:rPr b="0" lang="en-US" sz="1800" spc="-1" strike="noStrike">
                 <a:latin typeface="Arial"/>
               </a:rPr>
               <a:t>Seventh Outline Level</a:t>
             </a:r>
-            <a:endParaRPr b="0" lang="en-US" sz="2000" spc="-1" strike="noStrike">
-              <a:latin typeface="Arial"/>
+            <a:endParaRPr b="0" lang="en-US" sz="1800" spc="-1" strike="noStrike">
+              <a:latin typeface="Arial"/>
+            </a:endParaRPr>
+          </a:p>
+        </p:txBody>
+      </p:sp>
+      <p:sp>
+        <p:nvSpPr>
+          <p:cNvPr id="2" name="PlaceHolder 3"/>
+          <p:cNvSpPr>
+            <a:spLocks noGrp="1"/>
+          </p:cNvSpPr>
+          <p:nvPr>
+            <p:ph type="ftr" idx="1"/>
+          </p:nvPr>
+        </p:nvSpPr>
+        <p:spPr>
+          <a:xfrm>
+            <a:off x="3029040" y="4767120"/>
+            <a:ext cx="3085200" cy="272880"/>
+          </a:xfrm>
+          <a:prstGeom prst="rect">
+            <a:avLst/>
+          </a:prstGeom>
+          <a:noFill/>
+          <a:ln w="0">
+            <a:noFill/>
+          </a:ln>
+        </p:spPr>
+        <p:txBody>
+          <a:bodyPr lIns="90000" rIns="90000" tIns="45000" bIns="45000" anchor="ctr">
+            <a:noAutofit/>
+          </a:bodyPr>
+          <a:lstStyle>
+            <a:lvl1pPr algn="ctr">
+              <a:lnSpc>
+                <a:spcPct val="100000"/>
+              </a:lnSpc>
+              <a:buNone/>
+              <a:defRPr b="0" lang="en-US" sz="1400" spc="-1" strike="noStrike">
+                <a:latin typeface="Times New Roman"/>
+              </a:defRPr>
+            </a:lvl1pPr>
+          </a:lstStyle>
+          <a:p>
+            <a:pPr algn="ctr">
+              <a:lnSpc>
+                <a:spcPct val="100000"/>
+              </a:lnSpc>
+              <a:buNone/>
+            </a:pPr>
+            <a:r>
+              <a:rPr b="0" lang="en-US" sz="1400" spc="-1" strike="noStrike">
+                <a:latin typeface="Times New Roman"/>
+              </a:rPr>
+              <a:t>&lt;footer&gt;</a:t>
+            </a:r>
+            <a:endParaRPr b="0" lang="en-US" sz="1400" spc="-1" strike="noStrike">
+              <a:latin typeface="Times New Roman"/>
+            </a:endParaRPr>
+          </a:p>
+        </p:txBody>
+      </p:sp>
+      <p:sp>
+        <p:nvSpPr>
+          <p:cNvPr id="3" name="PlaceHolder 4"/>
+          <p:cNvSpPr>
+            <a:spLocks noGrp="1"/>
+          </p:cNvSpPr>
+          <p:nvPr>
+            <p:ph type="sldNum" idx="2"/>
+          </p:nvPr>
+        </p:nvSpPr>
+        <p:spPr>
+          <a:xfrm>
+            <a:off x="6458040" y="4767120"/>
+            <a:ext cx="2056320" cy="272880"/>
+          </a:xfrm>
+          <a:prstGeom prst="rect">
+            <a:avLst/>
+          </a:prstGeom>
+          <a:noFill/>
+          <a:ln w="0">
+            <a:noFill/>
+          </a:ln>
+        </p:spPr>
+        <p:txBody>
+          <a:bodyPr lIns="90000" rIns="90000" tIns="45000" bIns="45000" anchor="ctr">
+            <a:noAutofit/>
+          </a:bodyPr>
+          <a:lstStyle>
+            <a:lvl1pPr algn="r">
+              <a:lnSpc>
+                <a:spcPct val="100000"/>
+              </a:lnSpc>
+              <a:buNone/>
+              <a:defRPr b="0" lang="en-US" sz="900" spc="-1" strike="noStrike">
+                <a:solidFill>
+                  <a:srgbClr val="8b8b8b"/>
+                </a:solidFill>
+                <a:latin typeface="Calibri"/>
+              </a:defRPr>
+            </a:lvl1pPr>
+          </a:lstStyle>
+          <a:p>
+            <a:pPr algn="r">
+              <a:lnSpc>
+                <a:spcPct val="100000"/>
+              </a:lnSpc>
+              <a:buNone/>
+            </a:pPr>
+            <a:fld id="{A05570F8-EC91-4F38-98C0-40DF357E558F}" type="slidenum">
+              <a:rPr b="0" lang="en-US" sz="900" spc="-1" strike="noStrike">
+                <a:solidFill>
+                  <a:srgbClr val="8b8b8b"/>
+                </a:solidFill>
+                <a:latin typeface="Calibri"/>
+              </a:rPr>
+              <a:t>&lt;number&gt;</a:t>
+            </a:fld>
+            <a:endParaRPr b="0" lang="en-US" sz="900" spc="-1" strike="noStrike">
+              <a:latin typeface="Times New Roman"/>
+            </a:endParaRPr>
+          </a:p>
+        </p:txBody>
+      </p:sp>
+      <p:sp>
+        <p:nvSpPr>
+          <p:cNvPr id="4" name="PlaceHolder 5"/>
+          <p:cNvSpPr>
+            <a:spLocks noGrp="1"/>
+          </p:cNvSpPr>
+          <p:nvPr>
+            <p:ph type="dt" idx="3"/>
+          </p:nvPr>
+        </p:nvSpPr>
+        <p:spPr>
+          <a:xfrm>
+            <a:off x="628560" y="4767120"/>
+            <a:ext cx="2056320" cy="272880"/>
+          </a:xfrm>
+          <a:prstGeom prst="rect">
+            <a:avLst/>
+          </a:prstGeom>
+          <a:noFill/>
+          <a:ln w="0">
+            <a:noFill/>
+          </a:ln>
+        </p:spPr>
+        <p:txBody>
+          <a:bodyPr lIns="90000" rIns="90000" tIns="45000" bIns="45000" anchor="ctr">
+            <a:noAutofit/>
+          </a:bodyPr>
+          <a:lstStyle>
+            <a:lvl1pPr>
+              <a:defRPr b="0" lang="en-US" sz="1400" spc="-1" strike="noStrike">
+                <a:latin typeface="Times New Roman"/>
+              </a:defRPr>
+            </a:lvl1pPr>
+          </a:lstStyle>
+          <a:p>
+            <a:r>
+              <a:rPr b="0" lang="en-US" sz="1400" spc="-1" strike="noStrike">
+                <a:latin typeface="Times New Roman"/>
+              </a:rPr>
+              <a:t>&lt;date/time&gt;</a:t>
+            </a:r>
+            <a:endParaRPr b="0" lang="en-US" sz="1400" spc="-1" strike="noStrike">
+              <a:latin typeface="Times New Roman"/>
             </a:endParaRPr>
           </a:p>
         </p:txBody>
@@ -3389,7 +3305,7 @@
         <p:spPr>
           <a:xfrm>
             <a:off x="186840" y="178200"/>
-            <a:ext cx="8769960" cy="4757760"/>
+            <a:ext cx="8769600" cy="4757400"/>
           </a:xfrm>
           <a:prstGeom prst="roundRect">
             <a:avLst>
@@ -3427,7 +3343,7 @@
         <p:spPr>
           <a:xfrm>
             <a:off x="460080" y="622080"/>
-            <a:ext cx="6925680" cy="3306600"/>
+            <a:ext cx="6925320" cy="3306240"/>
           </a:xfrm>
           <a:prstGeom prst="rect">
             <a:avLst/>
@@ -3483,7 +3399,7 @@
         <p:spPr>
           <a:xfrm>
             <a:off x="5753880" y="2557440"/>
-            <a:ext cx="4009680" cy="3133080"/>
+            <a:ext cx="4009320" cy="3132720"/>
           </a:xfrm>
           <a:prstGeom prst="rect">
             <a:avLst/>
@@ -3536,7 +3452,7 @@
         <p:spPr>
           <a:xfrm>
             <a:off x="5753880" y="2557440"/>
-            <a:ext cx="4009680" cy="3133080"/>
+            <a:ext cx="4009320" cy="3132720"/>
           </a:xfrm>
           <a:prstGeom prst="rect">
             <a:avLst/>
@@ -3555,7 +3471,7 @@
         <p:spPr>
           <a:xfrm>
             <a:off x="185760" y="831240"/>
-            <a:ext cx="899280" cy="899280"/>
+            <a:ext cx="898920" cy="898920"/>
           </a:xfrm>
           <a:prstGeom prst="ellipse">
             <a:avLst/>
@@ -3615,7 +3531,7 @@
         <p:spPr>
           <a:xfrm>
             <a:off x="185760" y="2381400"/>
-            <a:ext cx="899280" cy="887400"/>
+            <a:ext cx="898920" cy="887040"/>
           </a:xfrm>
           <a:prstGeom prst="ellipse">
             <a:avLst/>
@@ -3675,7 +3591,7 @@
         <p:spPr>
           <a:xfrm>
             <a:off x="185760" y="3860640"/>
-            <a:ext cx="899280" cy="899280"/>
+            <a:ext cx="898920" cy="898920"/>
           </a:xfrm>
           <a:prstGeom prst="ellipse">
             <a:avLst/>
@@ -3735,7 +3651,7 @@
         <p:spPr>
           <a:xfrm>
             <a:off x="967680" y="797040"/>
-            <a:ext cx="3764520" cy="550440"/>
+            <a:ext cx="3764160" cy="550080"/>
           </a:xfrm>
           <a:prstGeom prst="rect">
             <a:avLst/>
@@ -3797,7 +3713,7 @@
         <p:spPr>
           <a:xfrm>
             <a:off x="967680" y="1332720"/>
-            <a:ext cx="3764520" cy="789480"/>
+            <a:ext cx="3764160" cy="789120"/>
           </a:xfrm>
           <a:prstGeom prst="rect">
             <a:avLst/>
@@ -3859,7 +3775,7 @@
         <p:spPr>
           <a:xfrm>
             <a:off x="964080" y="2292480"/>
-            <a:ext cx="3764520" cy="550440"/>
+            <a:ext cx="3764160" cy="550080"/>
           </a:xfrm>
           <a:prstGeom prst="rect">
             <a:avLst/>
@@ -3911,7 +3827,7 @@
         <p:spPr>
           <a:xfrm>
             <a:off x="964080" y="2825280"/>
-            <a:ext cx="3764520" cy="843120"/>
+            <a:ext cx="3764160" cy="842760"/>
           </a:xfrm>
           <a:prstGeom prst="rect">
             <a:avLst/>
@@ -3973,7 +3889,7 @@
         <p:spPr>
           <a:xfrm>
             <a:off x="964080" y="3777840"/>
-            <a:ext cx="3764520" cy="550440"/>
+            <a:ext cx="3764160" cy="550080"/>
           </a:xfrm>
           <a:prstGeom prst="rect">
             <a:avLst/>
@@ -4025,7 +3941,7 @@
         <p:spPr>
           <a:xfrm>
             <a:off x="964080" y="4310640"/>
-            <a:ext cx="3764520" cy="794520"/>
+            <a:ext cx="3764160" cy="794160"/>
           </a:xfrm>
           <a:prstGeom prst="rect">
             <a:avLst/>
@@ -4087,7 +4003,7 @@
         <p:spPr>
           <a:xfrm>
             <a:off x="5084640" y="987840"/>
-            <a:ext cx="3687480" cy="3496680"/>
+            <a:ext cx="3687120" cy="3496320"/>
           </a:xfrm>
           <a:prstGeom prst="roundRect">
             <a:avLst>
@@ -4151,7 +4067,7 @@
         <p:spPr>
           <a:xfrm>
             <a:off x="8519760" y="4831560"/>
-            <a:ext cx="484560" cy="226800"/>
+            <a:ext cx="484200" cy="226800"/>
           </a:xfrm>
           <a:prstGeom prst="rect">
             <a:avLst/>
@@ -4203,7 +4119,7 @@
         <p:spPr>
           <a:xfrm>
             <a:off x="421200" y="228600"/>
-            <a:ext cx="8457840" cy="685440"/>
+            <a:ext cx="8457480" cy="685080"/>
           </a:xfrm>
           <a:prstGeom prst="rect">
             <a:avLst/>
@@ -4232,7 +4148,11 @@
             </a:pPr>
             <a:r>
               <a:rPr b="0" lang="en-US" sz="1800" spc="-1" strike="noStrike">
+                <a:solidFill>
+                  <a:srgbClr val="000000"/>
+                </a:solidFill>
                 <a:latin typeface="Arial"/>
+                <a:ea typeface="DejaVu Sans"/>
               </a:rPr>
               <a:t>TITLE</a:t>
             </a:r>
@@ -4281,7 +4201,7 @@
         <p:spPr>
           <a:xfrm>
             <a:off x="506520" y="1484640"/>
-            <a:ext cx="2556720" cy="2055240"/>
+            <a:ext cx="2556360" cy="2054880"/>
           </a:xfrm>
           <a:prstGeom prst="roundRect">
             <a:avLst>
@@ -4321,7 +4241,7 @@
         <p:spPr>
           <a:xfrm>
             <a:off x="624240" y="1616760"/>
-            <a:ext cx="2289600" cy="729000"/>
+            <a:ext cx="2289240" cy="728640"/>
           </a:xfrm>
           <a:prstGeom prst="rect">
             <a:avLst/>
@@ -4373,7 +4293,7 @@
         <p:spPr>
           <a:xfrm>
             <a:off x="624240" y="2400480"/>
-            <a:ext cx="2289600" cy="1162080"/>
+            <a:ext cx="2289240" cy="1161720"/>
           </a:xfrm>
           <a:prstGeom prst="rect">
             <a:avLst/>
@@ -4435,7 +4355,7 @@
         <p:spPr>
           <a:xfrm>
             <a:off x="3309120" y="2066040"/>
-            <a:ext cx="2556720" cy="2055240"/>
+            <a:ext cx="2556360" cy="2054880"/>
           </a:xfrm>
           <a:prstGeom prst="roundRect">
             <a:avLst>
@@ -4475,7 +4395,7 @@
         <p:spPr>
           <a:xfrm>
             <a:off x="3426840" y="2198160"/>
-            <a:ext cx="2289600" cy="729000"/>
+            <a:ext cx="2289240" cy="728640"/>
           </a:xfrm>
           <a:prstGeom prst="rect">
             <a:avLst/>
@@ -4527,7 +4447,7 @@
         <p:spPr>
           <a:xfrm>
             <a:off x="3426840" y="2981880"/>
-            <a:ext cx="2289600" cy="1162080"/>
+            <a:ext cx="2289240" cy="1161720"/>
           </a:xfrm>
           <a:prstGeom prst="rect">
             <a:avLst/>
@@ -4579,7 +4499,7 @@
         <p:spPr>
           <a:xfrm>
             <a:off x="6111720" y="2659320"/>
-            <a:ext cx="2556720" cy="2055240"/>
+            <a:ext cx="2556360" cy="2054880"/>
           </a:xfrm>
           <a:prstGeom prst="roundRect">
             <a:avLst>
@@ -4619,7 +4539,7 @@
         <p:spPr>
           <a:xfrm>
             <a:off x="6229440" y="2791440"/>
-            <a:ext cx="2289600" cy="729000"/>
+            <a:ext cx="2289240" cy="728640"/>
           </a:xfrm>
           <a:prstGeom prst="rect">
             <a:avLst/>
@@ -4654,7 +4574,7 @@
                 <a:latin typeface="Arial"/>
                 <a:ea typeface="DejaVu Sans"/>
               </a:rPr>
-              <a:t>SUBTITLE2</a:t>
+              <a:t>SUBTITLE3</a:t>
             </a:r>
             <a:endParaRPr b="0" lang="en-US" sz="1400" spc="-1" strike="noStrike">
               <a:latin typeface="Arial"/>
@@ -4671,7 +4591,7 @@
         <p:spPr>
           <a:xfrm>
             <a:off x="6229440" y="3574800"/>
-            <a:ext cx="2289600" cy="1162080"/>
+            <a:ext cx="2289240" cy="1161720"/>
           </a:xfrm>
           <a:prstGeom prst="rect">
             <a:avLst/>
@@ -4706,7 +4626,7 @@
                 <a:latin typeface="Arial"/>
                 <a:ea typeface="DejaVu Sans"/>
               </a:rPr>
-              <a:t>TEXT2</a:t>
+              <a:t>TEXT3</a:t>
             </a:r>
             <a:endParaRPr b="0" lang="en-US" sz="1100" spc="-1" strike="noStrike">
               <a:latin typeface="Arial"/>
@@ -4723,7 +4643,7 @@
         <p:spPr>
           <a:xfrm>
             <a:off x="8519760" y="4831560"/>
-            <a:ext cx="484560" cy="226800"/>
+            <a:ext cx="484200" cy="226800"/>
           </a:xfrm>
           <a:prstGeom prst="rect">
             <a:avLst/>
@@ -4775,7 +4695,7 @@
         <p:spPr>
           <a:xfrm>
             <a:off x="457200" y="228600"/>
-            <a:ext cx="8229240" cy="1142640"/>
+            <a:ext cx="8228880" cy="1142280"/>
           </a:xfrm>
           <a:prstGeom prst="rect">
             <a:avLst/>
@@ -4804,7 +4724,11 @@
             </a:pPr>
             <a:r>
               <a:rPr b="0" lang="en-US" sz="1800" spc="-1" strike="noStrike">
+                <a:solidFill>
+                  <a:srgbClr val="000000"/>
+                </a:solidFill>
                 <a:latin typeface="Arial"/>
+                <a:ea typeface="DejaVu Sans"/>
               </a:rPr>
               <a:t>TITLE</a:t>
             </a:r>
@@ -4853,7 +4777,7 @@
         <p:spPr>
           <a:xfrm>
             <a:off x="3601800" y="3271680"/>
-            <a:ext cx="5236200" cy="1320840"/>
+            <a:ext cx="5235840" cy="1320480"/>
           </a:xfrm>
           <a:prstGeom prst="roundRect">
             <a:avLst>
@@ -4891,7 +4815,7 @@
         <p:spPr>
           <a:xfrm>
             <a:off x="6308640" y="1028880"/>
-            <a:ext cx="2532960" cy="2056680"/>
+            <a:ext cx="2532600" cy="2056320"/>
           </a:xfrm>
           <a:prstGeom prst="roundRect">
             <a:avLst>
@@ -4929,7 +4853,7 @@
         <p:spPr>
           <a:xfrm>
             <a:off x="3604320" y="1014480"/>
-            <a:ext cx="2532960" cy="2056680"/>
+            <a:ext cx="2532600" cy="2056320"/>
           </a:xfrm>
           <a:prstGeom prst="roundRect">
             <a:avLst>
@@ -4967,7 +4891,7 @@
         <p:spPr>
           <a:xfrm>
             <a:off x="3696480" y="1059120"/>
-            <a:ext cx="2343240" cy="713520"/>
+            <a:ext cx="2342880" cy="713160"/>
           </a:xfrm>
           <a:prstGeom prst="rect">
             <a:avLst/>
@@ -5029,7 +4953,7 @@
         <p:spPr>
           <a:xfrm>
             <a:off x="3696480" y="1843560"/>
-            <a:ext cx="2343240" cy="1141920"/>
+            <a:ext cx="2342880" cy="1141560"/>
           </a:xfrm>
           <a:prstGeom prst="rect">
             <a:avLst/>
@@ -5091,7 +5015,7 @@
         <p:spPr>
           <a:xfrm>
             <a:off x="6400080" y="1059120"/>
-            <a:ext cx="2340000" cy="713520"/>
+            <a:ext cx="2339640" cy="713160"/>
           </a:xfrm>
           <a:prstGeom prst="rect">
             <a:avLst/>
@@ -5143,7 +5067,7 @@
         <p:spPr>
           <a:xfrm>
             <a:off x="6400080" y="1843560"/>
-            <a:ext cx="2340000" cy="1141920"/>
+            <a:ext cx="2339640" cy="1141560"/>
           </a:xfrm>
           <a:prstGeom prst="rect">
             <a:avLst/>
@@ -5205,7 +5129,7 @@
         <p:spPr>
           <a:xfrm>
             <a:off x="3696480" y="3362040"/>
-            <a:ext cx="5236200" cy="328680"/>
+            <a:ext cx="5235840" cy="328320"/>
           </a:xfrm>
           <a:prstGeom prst="rect">
             <a:avLst/>
@@ -5257,7 +5181,7 @@
         <p:spPr>
           <a:xfrm>
             <a:off x="3696480" y="3713400"/>
-            <a:ext cx="5146560" cy="713520"/>
+            <a:ext cx="5146200" cy="713160"/>
           </a:xfrm>
           <a:prstGeom prst="rect">
             <a:avLst/>
@@ -5319,7 +5243,7 @@
         <p:spPr>
           <a:xfrm>
             <a:off x="384840" y="1028880"/>
-            <a:ext cx="3002400" cy="3564000"/>
+            <a:ext cx="3002040" cy="3563640"/>
           </a:xfrm>
           <a:prstGeom prst="roundRect">
             <a:avLst>
@@ -5383,7 +5307,7 @@
         <p:spPr>
           <a:xfrm>
             <a:off x="8519760" y="4831560"/>
-            <a:ext cx="484560" cy="226800"/>
+            <a:ext cx="484200" cy="226800"/>
           </a:xfrm>
           <a:prstGeom prst="rect">
             <a:avLst/>
@@ -5435,7 +5359,7 @@
         <p:spPr>
           <a:xfrm>
             <a:off x="313200" y="228600"/>
-            <a:ext cx="8457840" cy="685440"/>
+            <a:ext cx="8457480" cy="685080"/>
           </a:xfrm>
           <a:prstGeom prst="rect">
             <a:avLst/>
@@ -5464,7 +5388,11 @@
             </a:pPr>
             <a:r>
               <a:rPr b="0" lang="en-US" sz="1800" spc="-1" strike="noStrike">
+                <a:solidFill>
+                  <a:srgbClr val="000000"/>
+                </a:solidFill>
                 <a:latin typeface="Arial"/>
+                <a:ea typeface="DejaVu Sans"/>
               </a:rPr>
               <a:t>TITLE</a:t>
             </a:r>
@@ -5517,7 +5445,7 @@
         <p:spPr>
           <a:xfrm>
             <a:off x="-877680" y="2245320"/>
-            <a:ext cx="4613040" cy="3604680"/>
+            <a:ext cx="4612680" cy="3604320"/>
           </a:xfrm>
           <a:prstGeom prst="rect">
             <a:avLst/>
@@ -5536,7 +5464,7 @@
         <p:spPr>
           <a:xfrm>
             <a:off x="4157640" y="631080"/>
-            <a:ext cx="899280" cy="899280"/>
+            <a:ext cx="898920" cy="898920"/>
           </a:xfrm>
           <a:prstGeom prst="ellipse">
             <a:avLst/>
@@ -5598,7 +5526,7 @@
         <p:spPr>
           <a:xfrm>
             <a:off x="4157640" y="2127600"/>
-            <a:ext cx="899280" cy="887400"/>
+            <a:ext cx="898920" cy="887040"/>
           </a:xfrm>
           <a:prstGeom prst="ellipse">
             <a:avLst/>
@@ -5660,7 +5588,7 @@
         <p:spPr>
           <a:xfrm>
             <a:off x="4157640" y="3612240"/>
-            <a:ext cx="899280" cy="899280"/>
+            <a:ext cx="898920" cy="898920"/>
           </a:xfrm>
           <a:prstGeom prst="ellipse">
             <a:avLst/>
@@ -5722,7 +5650,7 @@
         <p:spPr>
           <a:xfrm>
             <a:off x="5146560" y="489600"/>
-            <a:ext cx="3578760" cy="550440"/>
+            <a:ext cx="3578400" cy="550080"/>
           </a:xfrm>
           <a:prstGeom prst="rect">
             <a:avLst/>
@@ -5784,7 +5712,7 @@
         <p:spPr>
           <a:xfrm>
             <a:off x="5146560" y="1025280"/>
-            <a:ext cx="3578760" cy="789480"/>
+            <a:ext cx="3578400" cy="789120"/>
           </a:xfrm>
           <a:prstGeom prst="rect">
             <a:avLst/>
@@ -5846,7 +5774,7 @@
         <p:spPr>
           <a:xfrm>
             <a:off x="5142960" y="1985400"/>
-            <a:ext cx="3578760" cy="550440"/>
+            <a:ext cx="3578400" cy="550080"/>
           </a:xfrm>
           <a:prstGeom prst="rect">
             <a:avLst/>
@@ -5898,7 +5826,7 @@
         <p:spPr>
           <a:xfrm>
             <a:off x="5142960" y="2517840"/>
-            <a:ext cx="3578760" cy="843120"/>
+            <a:ext cx="3578400" cy="842760"/>
           </a:xfrm>
           <a:prstGeom prst="rect">
             <a:avLst/>
@@ -5960,7 +5888,7 @@
         <p:spPr>
           <a:xfrm>
             <a:off x="5142960" y="3470760"/>
-            <a:ext cx="3578760" cy="550440"/>
+            <a:ext cx="3578400" cy="550080"/>
           </a:xfrm>
           <a:prstGeom prst="rect">
             <a:avLst/>
@@ -6012,7 +5940,7 @@
         <p:spPr>
           <a:xfrm>
             <a:off x="5142960" y="4003560"/>
-            <a:ext cx="3578760" cy="794520"/>
+            <a:ext cx="3578400" cy="794160"/>
           </a:xfrm>
           <a:prstGeom prst="rect">
             <a:avLst/>
@@ -6074,7 +6002,7 @@
         <p:spPr>
           <a:xfrm>
             <a:off x="8519760" y="4831560"/>
-            <a:ext cx="484560" cy="226800"/>
+            <a:ext cx="484200" cy="226800"/>
           </a:xfrm>
           <a:prstGeom prst="rect">
             <a:avLst/>
@@ -6126,7 +6054,7 @@
         <p:spPr>
           <a:xfrm>
             <a:off x="264600" y="228600"/>
-            <a:ext cx="3657240" cy="2016360"/>
+            <a:ext cx="3656880" cy="2016000"/>
           </a:xfrm>
           <a:prstGeom prst="rect">
             <a:avLst/>
@@ -6155,7 +6083,11 @@
             </a:pPr>
             <a:r>
               <a:rPr b="0" lang="en-US" sz="1800" spc="-1" strike="noStrike">
+                <a:solidFill>
+                  <a:srgbClr val="000000"/>
+                </a:solidFill>
                 <a:latin typeface="Arial"/>
+                <a:ea typeface="DejaVu Sans"/>
               </a:rPr>
               <a:t>TITLE</a:t>
             </a:r>
@@ -6204,7 +6136,7 @@
         <p:spPr>
           <a:xfrm>
             <a:off x="4238640" y="831240"/>
-            <a:ext cx="899280" cy="899280"/>
+            <a:ext cx="898920" cy="898920"/>
           </a:xfrm>
           <a:prstGeom prst="ellipse">
             <a:avLst/>
@@ -6264,7 +6196,7 @@
         <p:spPr>
           <a:xfrm>
             <a:off x="4238640" y="2243880"/>
-            <a:ext cx="899280" cy="887400"/>
+            <a:ext cx="898920" cy="887040"/>
           </a:xfrm>
           <a:prstGeom prst="ellipse">
             <a:avLst/>
@@ -6324,7 +6256,7 @@
         <p:spPr>
           <a:xfrm>
             <a:off x="4238640" y="3667320"/>
-            <a:ext cx="899280" cy="899280"/>
+            <a:ext cx="898920" cy="898920"/>
           </a:xfrm>
           <a:prstGeom prst="ellipse">
             <a:avLst/>
@@ -6384,7 +6316,7 @@
         <p:spPr>
           <a:xfrm>
             <a:off x="5020200" y="797040"/>
-            <a:ext cx="3764520" cy="550440"/>
+            <a:ext cx="3764160" cy="550080"/>
           </a:xfrm>
           <a:prstGeom prst="rect">
             <a:avLst/>
@@ -6446,7 +6378,7 @@
         <p:spPr>
           <a:xfrm>
             <a:off x="5020200" y="1332720"/>
-            <a:ext cx="3764520" cy="789480"/>
+            <a:ext cx="3764160" cy="789120"/>
           </a:xfrm>
           <a:prstGeom prst="rect">
             <a:avLst/>
@@ -6508,7 +6440,7 @@
         <p:spPr>
           <a:xfrm>
             <a:off x="5016600" y="2155320"/>
-            <a:ext cx="3764520" cy="550440"/>
+            <a:ext cx="3764160" cy="550080"/>
           </a:xfrm>
           <a:prstGeom prst="rect">
             <a:avLst/>
@@ -6560,7 +6492,7 @@
         <p:spPr>
           <a:xfrm>
             <a:off x="5016600" y="2687760"/>
-            <a:ext cx="3764520" cy="843120"/>
+            <a:ext cx="3764160" cy="842760"/>
           </a:xfrm>
           <a:prstGeom prst="rect">
             <a:avLst/>
@@ -6622,7 +6554,7 @@
         <p:spPr>
           <a:xfrm>
             <a:off x="5016600" y="3584880"/>
-            <a:ext cx="3764520" cy="550440"/>
+            <a:ext cx="3764160" cy="550080"/>
           </a:xfrm>
           <a:prstGeom prst="rect">
             <a:avLst/>
@@ -6674,7 +6606,7 @@
         <p:spPr>
           <a:xfrm>
             <a:off x="5016600" y="4117320"/>
-            <a:ext cx="3764520" cy="794520"/>
+            <a:ext cx="3764160" cy="794160"/>
           </a:xfrm>
           <a:prstGeom prst="rect">
             <a:avLst/>
@@ -6736,7 +6668,7 @@
         <p:spPr>
           <a:xfrm>
             <a:off x="384840" y="987840"/>
-            <a:ext cx="3687480" cy="3496680"/>
+            <a:ext cx="3687120" cy="3496320"/>
           </a:xfrm>
           <a:prstGeom prst="roundRect">
             <a:avLst>
@@ -6800,7 +6732,7 @@
         <p:spPr>
           <a:xfrm>
             <a:off x="8519760" y="4831560"/>
-            <a:ext cx="484560" cy="226800"/>
+            <a:ext cx="484200" cy="226800"/>
           </a:xfrm>
           <a:prstGeom prst="rect">
             <a:avLst/>
@@ -6852,7 +6784,7 @@
         <p:spPr>
           <a:xfrm>
             <a:off x="300600" y="228600"/>
-            <a:ext cx="8614440" cy="685440"/>
+            <a:ext cx="8614080" cy="685080"/>
           </a:xfrm>
           <a:prstGeom prst="rect">
             <a:avLst/>
@@ -6881,7 +6813,11 @@
             </a:pPr>
             <a:r>
               <a:rPr b="0" lang="en-US" sz="1800" spc="-1" strike="noStrike">
+                <a:solidFill>
+                  <a:srgbClr val="000000"/>
+                </a:solidFill>
                 <a:latin typeface="Arial"/>
+                <a:ea typeface="DejaVu Sans"/>
               </a:rPr>
               <a:t>TITLE</a:t>
             </a:r>
@@ -6930,7 +6866,7 @@
         <p:spPr>
           <a:xfrm>
             <a:off x="0" y="3075480"/>
-            <a:ext cx="9143280" cy="2494800"/>
+            <a:ext cx="9142920" cy="2494440"/>
           </a:xfrm>
           <a:prstGeom prst="roundRect">
             <a:avLst>
@@ -6994,7 +6930,7 @@
         <p:spPr>
           <a:xfrm>
             <a:off x="474840" y="841680"/>
-            <a:ext cx="2556720" cy="2055240"/>
+            <a:ext cx="2556360" cy="2054880"/>
           </a:xfrm>
           <a:prstGeom prst="roundRect">
             <a:avLst>
@@ -7034,7 +6970,7 @@
         <p:spPr>
           <a:xfrm>
             <a:off x="592920" y="973800"/>
-            <a:ext cx="2289600" cy="729000"/>
+            <a:ext cx="2289240" cy="728640"/>
           </a:xfrm>
           <a:prstGeom prst="rect">
             <a:avLst/>
@@ -7086,7 +7022,7 @@
         <p:spPr>
           <a:xfrm>
             <a:off x="592920" y="1757520"/>
-            <a:ext cx="2289600" cy="1162080"/>
+            <a:ext cx="2289240" cy="1161720"/>
           </a:xfrm>
           <a:prstGeom prst="rect">
             <a:avLst/>
@@ -7148,7 +7084,7 @@
         <p:spPr>
           <a:xfrm>
             <a:off x="3309120" y="841680"/>
-            <a:ext cx="2556720" cy="2055240"/>
+            <a:ext cx="2556360" cy="2054880"/>
           </a:xfrm>
           <a:prstGeom prst="roundRect">
             <a:avLst>
@@ -7188,7 +7124,7 @@
         <p:spPr>
           <a:xfrm>
             <a:off x="3426840" y="973800"/>
-            <a:ext cx="2289600" cy="729000"/>
+            <a:ext cx="2289240" cy="728640"/>
           </a:xfrm>
           <a:prstGeom prst="rect">
             <a:avLst/>
@@ -7240,7 +7176,7 @@
         <p:spPr>
           <a:xfrm>
             <a:off x="3426840" y="1757520"/>
-            <a:ext cx="2289600" cy="1162080"/>
+            <a:ext cx="2289240" cy="1161720"/>
           </a:xfrm>
           <a:prstGeom prst="rect">
             <a:avLst/>
@@ -7292,7 +7228,7 @@
         <p:spPr>
           <a:xfrm>
             <a:off x="6143040" y="841680"/>
-            <a:ext cx="2556720" cy="2055240"/>
+            <a:ext cx="2556360" cy="2054880"/>
           </a:xfrm>
           <a:prstGeom prst="roundRect">
             <a:avLst>
@@ -7332,7 +7268,7 @@
         <p:spPr>
           <a:xfrm>
             <a:off x="6260760" y="973800"/>
-            <a:ext cx="2289600" cy="729000"/>
+            <a:ext cx="2289240" cy="728640"/>
           </a:xfrm>
           <a:prstGeom prst="rect">
             <a:avLst/>
@@ -7384,7 +7320,7 @@
         <p:spPr>
           <a:xfrm>
             <a:off x="6260760" y="1757520"/>
-            <a:ext cx="2289600" cy="1162080"/>
+            <a:ext cx="2289240" cy="1161720"/>
           </a:xfrm>
           <a:prstGeom prst="rect">
             <a:avLst/>
@@ -7436,7 +7372,7 @@
         <p:spPr>
           <a:xfrm>
             <a:off x="8519760" y="4831560"/>
-            <a:ext cx="484560" cy="226800"/>
+            <a:ext cx="484200" cy="226800"/>
           </a:xfrm>
           <a:prstGeom prst="rect">
             <a:avLst/>
@@ -7488,7 +7424,7 @@
         <p:spPr>
           <a:xfrm>
             <a:off x="457200" y="349200"/>
-            <a:ext cx="8457840" cy="1022040"/>
+            <a:ext cx="8457480" cy="1021680"/>
           </a:xfrm>
           <a:prstGeom prst="rect">
             <a:avLst/>
@@ -7517,7 +7453,11 @@
             </a:pPr>
             <a:r>
               <a:rPr b="0" lang="en-US" sz="1800" spc="-1" strike="noStrike">
+                <a:solidFill>
+                  <a:srgbClr val="000000"/>
+                </a:solidFill>
                 <a:latin typeface="Arial"/>
+                <a:ea typeface="DejaVu Sans"/>
               </a:rPr>
               <a:t>TITLE</a:t>
             </a:r>
@@ -7566,7 +7506,7 @@
         <p:spPr>
           <a:xfrm>
             <a:off x="186840" y="178200"/>
-            <a:ext cx="8769960" cy="4757760"/>
+            <a:ext cx="8769600" cy="4757400"/>
           </a:xfrm>
           <a:prstGeom prst="roundRect">
             <a:avLst>
@@ -7604,7 +7544,7 @@
         <p:spPr>
           <a:xfrm>
             <a:off x="460080" y="622080"/>
-            <a:ext cx="6925680" cy="3306600"/>
+            <a:ext cx="6925320" cy="3306240"/>
           </a:xfrm>
           <a:prstGeom prst="rect">
             <a:avLst/>
@@ -7660,7 +7600,7 @@
         <p:spPr>
           <a:xfrm>
             <a:off x="5753880" y="2557440"/>
-            <a:ext cx="4009680" cy="3133080"/>
+            <a:ext cx="4009320" cy="3132720"/>
           </a:xfrm>
           <a:prstGeom prst="rect">
             <a:avLst/>
